--- a/topic05/talk-1/ReactJS_02-1.pptx
+++ b/topic05/talk-1/ReactJS_02-1.pptx
@@ -293,7 +293,7 @@
               <a:pPr>
                 <a:defRPr/>
               </a:pPr>
-              <a:t>5/28/2024</a:t>
+              <a:t>3/18/2026</a:t>
             </a:fld>
             <a:endParaRPr lang="en-US" altLang="en-US"/>
           </a:p>
@@ -8014,20 +8014,9 @@
               <a:defRPr/>
             </a:pPr>
             <a:r>
-              <a:rPr lang="en-IE" altLang="en-US" sz="2000" b="1" dirty="0">
-                <a:latin typeface="Arial" panose="020B0604020202020204" pitchFamily="34" charset="0"/>
-                <a:ea typeface="ＭＳ Ｐゴシック" panose="020B0600070205080204" pitchFamily="34" charset="-128"/>
-              </a:rPr>
-              <a:t>Introduced in version 16.8.0 (February 2019)</a:t>
-            </a:r>
-          </a:p>
-          <a:p>
-            <a:pPr eaLnBrk="1" hangingPunct="1">
-              <a:lnSpc>
-                <a:spcPct val="70000"/>
-              </a:lnSpc>
-              <a:defRPr/>
-            </a:pPr>
+              <a:rPr lang="en-GB" sz="2000" b="1" dirty="0"/>
+              <a:t>A React Hook is a special function that lets you “hook into” React features (like state and lifecycle) inside functional components.</a:t>
+            </a:r>
             <a:endParaRPr lang="en-IE" sz="2000" b="1" dirty="0"/>
           </a:p>
           <a:p>
@@ -8053,7 +8042,7 @@
             </a:pPr>
             <a:r>
               <a:rPr lang="en-IE" sz="2000" b="1" dirty="0"/>
-              <a:t>Functions (some are HOFs).</a:t>
+              <a:t>Functions (some are Higher Order Functions).</a:t>
             </a:r>
           </a:p>
           <a:p>
@@ -8653,13 +8642,13 @@
               <p:cTn id="2" dur="indefinite" nodeType="mainSeq">
                 <p:childTnLst>
                   <p:par>
-                    <p:cTn id="3" fill="hold" nodeType="clickPar">
+                    <p:cTn id="3" fill="hold">
                       <p:stCondLst>
                         <p:cond delay="indefinite"/>
                       </p:stCondLst>
                       <p:childTnLst>
                         <p:par>
-                          <p:cTn id="4" fill="hold" nodeType="withGroup">
+                          <p:cTn id="4" fill="hold">
                             <p:stCondLst>
                               <p:cond delay="0"/>
                             </p:stCondLst>
@@ -8680,7 +8669,7 @@
                                         <p:tgtEl>
                                           <p:spTgt spid="30722">
                                             <p:txEl>
-                                              <p:pRg st="0" end="0"/>
+                                              <p:pRg st="1" end="1"/>
                                             </p:txEl>
                                           </p:spTgt>
                                         </p:tgtEl>
@@ -8702,13 +8691,13 @@
                     </p:cTn>
                   </p:par>
                   <p:par>
-                    <p:cTn id="7" fill="hold" nodeType="clickPar">
+                    <p:cTn id="7" fill="hold">
                       <p:stCondLst>
                         <p:cond delay="indefinite"/>
                       </p:stCondLst>
                       <p:childTnLst>
                         <p:par>
-                          <p:cTn id="8" fill="hold" nodeType="withGroup">
+                          <p:cTn id="8" fill="hold">
                             <p:stCondLst>
                               <p:cond delay="0"/>
                             </p:stCondLst>
@@ -8729,7 +8718,7 @@
                                         <p:tgtEl>
                                           <p:spTgt spid="30722">
                                             <p:txEl>
-                                              <p:pRg st="2" end="2"/>
+                                              <p:pRg st="0" end="0"/>
                                             </p:txEl>
                                           </p:spTgt>
                                         </p:tgtEl>
@@ -8760,7 +8749,7 @@
                                         <p:tgtEl>
                                           <p:spTgt spid="30722">
                                             <p:txEl>
-                                              <p:pRg st="3" end="3"/>
+                                              <p:pRg st="2" end="2"/>
                                             </p:txEl>
                                           </p:spTgt>
                                         </p:tgtEl>
@@ -8791,7 +8780,7 @@
                                         <p:tgtEl>
                                           <p:spTgt spid="30722">
                                             <p:txEl>
-                                              <p:pRg st="4" end="4"/>
+                                              <p:pRg st="3" end="3"/>
                                             </p:txEl>
                                           </p:spTgt>
                                         </p:tgtEl>
@@ -8840,7 +8829,7 @@
                                         <p:tgtEl>
                                           <p:spTgt spid="30722">
                                             <p:txEl>
-                                              <p:pRg st="6" end="6"/>
+                                              <p:pRg st="5" end="5"/>
                                             </p:txEl>
                                           </p:spTgt>
                                         </p:tgtEl>
@@ -8871,7 +8860,7 @@
                                         <p:tgtEl>
                                           <p:spTgt spid="30722">
                                             <p:txEl>
-                                              <p:pRg st="7" end="7"/>
+                                              <p:pRg st="6" end="6"/>
                                             </p:txEl>
                                           </p:spTgt>
                                         </p:tgtEl>
@@ -8920,7 +8909,7 @@
                                         <p:tgtEl>
                                           <p:spTgt spid="30722">
                                             <p:txEl>
-                                              <p:pRg st="9" end="9"/>
+                                              <p:pRg st="8" end="8"/>
                                             </p:txEl>
                                           </p:spTgt>
                                         </p:tgtEl>
@@ -8951,7 +8940,7 @@
                                         <p:tgtEl>
                                           <p:spTgt spid="30722">
                                             <p:txEl>
-                                              <p:pRg st="10" end="10"/>
+                                              <p:pRg st="9" end="9"/>
                                             </p:txEl>
                                           </p:spTgt>
                                         </p:tgtEl>
@@ -8982,7 +8971,7 @@
                                         <p:tgtEl>
                                           <p:spTgt spid="30722">
                                             <p:txEl>
-                                              <p:pRg st="11" end="11"/>
+                                              <p:pRg st="10" end="10"/>
                                             </p:txEl>
                                           </p:spTgt>
                                         </p:tgtEl>
@@ -16169,7 +16158,7 @@
                 <a:latin typeface="Arial" charset="0"/>
                 <a:ea typeface="ＭＳ Ｐゴシック" charset="-128"/>
               </a:rPr>
-              <a:t> - Passed in to a component; Immutable; the props object.</a:t>
+              <a:t> - Passed into a component; Immutable; the props object.</a:t>
             </a:r>
           </a:p>
           <a:p>
@@ -17155,21 +17144,7 @@
                 <a:latin typeface="Arial" panose="020B0604020202020204" pitchFamily="34" charset="0"/>
                 <a:ea typeface="ＭＳ Ｐゴシック" panose="020B0600070205080204" pitchFamily="34" charset="-128"/>
               </a:rPr>
-              <a:t>Ref. </a:t>
-            </a:r>
-            <a:r>
-              <a:rPr lang="en-US" altLang="en-US" sz="2000" dirty="0" err="1">
-                <a:latin typeface="Arial" panose="020B0604020202020204" pitchFamily="34" charset="0"/>
-                <a:ea typeface="ＭＳ Ｐゴシック" panose="020B0600070205080204" pitchFamily="34" charset="-128"/>
-              </a:rPr>
-              <a:t>basicReactLab</a:t>
-            </a:r>
-            <a:r>
-              <a:rPr lang="en-US" altLang="en-US" sz="2000" b="1" dirty="0">
-                <a:latin typeface="Arial" panose="020B0604020202020204" pitchFamily="34" charset="0"/>
-                <a:ea typeface="ＭＳ Ｐゴシック" panose="020B0600070205080204" pitchFamily="34" charset="-128"/>
-              </a:rPr>
-              <a:t> samples – sample 06.</a:t>
+              <a:t>Ref: Examples Archive in this topic</a:t>
             </a:r>
             <a:endParaRPr lang="en-US" altLang="en-US" sz="2000" dirty="0">
               <a:latin typeface="Arial" panose="020B0604020202020204" pitchFamily="34" charset="0"/>
@@ -17248,14 +17223,7 @@
                 <a:latin typeface="Arial" panose="020B0604020202020204" pitchFamily="34" charset="0"/>
                 <a:ea typeface="ＭＳ Ｐゴシック" panose="020B0600070205080204" pitchFamily="34" charset="-128"/>
               </a:rPr>
-              <a:t>Termed a React </a:t>
-            </a:r>
-            <a:r>
-              <a:rPr lang="en-US" altLang="en-US" sz="2000" dirty="0">
-                <a:latin typeface="Arial" panose="020B0604020202020204" pitchFamily="34" charset="0"/>
-                <a:ea typeface="ＭＳ Ｐゴシック" panose="020B0600070205080204" pitchFamily="34" charset="-128"/>
-              </a:rPr>
-              <a:t>hook.</a:t>
+              <a:t>Termed a React hook.</a:t>
             </a:r>
           </a:p>
           <a:p>
@@ -17775,10 +17743,10 @@
       </p:sp>
       <p:pic>
         <p:nvPicPr>
-          <p:cNvPr id="4" name="Picture 3">
+          <p:cNvPr id="7" name="Picture 6">
             <a:extLst>
               <a:ext uri="{FF2B5EF4-FFF2-40B4-BE49-F238E27FC236}">
-                <a16:creationId xmlns:a16="http://schemas.microsoft.com/office/drawing/2014/main" id="{C1094806-551A-B5C7-7630-551F11CC06BD}"/>
+                <a16:creationId xmlns:a16="http://schemas.microsoft.com/office/drawing/2014/main" id="{EE9A8B52-B631-397E-4E8C-8FDD5EF549F4}"/>
               </a:ext>
             </a:extLst>
           </p:cNvPr>
@@ -17795,8 +17763,8 @@
         </p:blipFill>
         <p:spPr>
           <a:xfrm>
-            <a:off x="7239000" y="1815465"/>
-            <a:ext cx="4829968" cy="4412993"/>
+            <a:off x="7315201" y="1506964"/>
+            <a:ext cx="4435489" cy="5076398"/>
           </a:xfrm>
           <a:prstGeom prst="rect">
             <a:avLst/>
@@ -20512,25 +20480,18 @@
               <a:defRPr/>
             </a:pPr>
             <a:r>
+              <a:rPr lang="en-US" altLang="en-US" sz="2000" dirty="0">
+                <a:latin typeface="Arial" charset="0"/>
+                <a:ea typeface="ＭＳ Ｐゴシック" charset="-128"/>
+              </a:rPr>
+              <a:t>In React, data flow is </a:t>
+            </a:r>
+            <a:r>
               <a:rPr lang="en-US" altLang="en-US" sz="2000" b="1" dirty="0">
                 <a:latin typeface="Arial" charset="0"/>
                 <a:ea typeface="ＭＳ Ｐゴシック" charset="-128"/>
               </a:rPr>
-              <a:t>In React, data flow is </a:t>
-            </a:r>
-            <a:r>
-              <a:rPr lang="en-US" altLang="en-US" sz="2000" dirty="0">
-                <a:latin typeface="Arial" charset="0"/>
-                <a:ea typeface="ＭＳ Ｐゴシック" charset="-128"/>
-              </a:rPr>
-              <a:t>unidirectional</a:t>
-            </a:r>
-            <a:r>
-              <a:rPr lang="en-US" altLang="en-US" sz="2000" b="1" dirty="0">
-                <a:latin typeface="Arial" charset="0"/>
-                <a:ea typeface="ＭＳ Ｐゴシック" charset="-128"/>
-              </a:rPr>
-              <a:t> ONLY.</a:t>
+              <a:t>unidirectional ONLY.</a:t>
             </a:r>
           </a:p>
           <a:p>
@@ -20543,25 +20504,11 @@
               <a:defRPr/>
             </a:pPr>
             <a:r>
-              <a:rPr lang="en-US" altLang="en-US" sz="2000" b="1" dirty="0">
-                <a:latin typeface="Arial" charset="0"/>
-                <a:ea typeface="ＭＳ Ｐゴシック" charset="-128"/>
-              </a:rPr>
-              <a:t>Other SPA frameworks use </a:t>
-            </a:r>
-            <a:r>
               <a:rPr lang="en-US" altLang="en-US" sz="2000" dirty="0">
                 <a:latin typeface="Arial" charset="0"/>
                 <a:ea typeface="ＭＳ Ｐゴシック" charset="-128"/>
               </a:rPr>
-              <a:t>two-way data binding</a:t>
-            </a:r>
-            <a:r>
-              <a:rPr lang="en-US" altLang="en-US" sz="2000" b="1" dirty="0">
-                <a:latin typeface="Arial" charset="0"/>
-                <a:ea typeface="ＭＳ Ｐゴシック" charset="-128"/>
-              </a:rPr>
-              <a:t>. </a:t>
+              <a:t>Other SPA frameworks use two-way data binding. </a:t>
             </a:r>
           </a:p>
           <a:p>
@@ -20573,7 +20520,7 @@
               <a:buChar char="•"/>
               <a:defRPr/>
             </a:pPr>
-            <a:endParaRPr lang="en-US" altLang="en-US" sz="2000" b="1" dirty="0">
+            <a:endParaRPr lang="en-US" altLang="en-US" sz="2000" dirty="0">
               <a:latin typeface="Arial" charset="0"/>
               <a:ea typeface="ＭＳ Ｐゴシック" charset="-128"/>
             </a:endParaRPr>
@@ -20588,53 +20535,25 @@
               <a:defRPr/>
             </a:pPr>
             <a:r>
+              <a:rPr lang="en-US" altLang="en-US" sz="2000" dirty="0">
+                <a:latin typeface="Arial" charset="0"/>
+                <a:ea typeface="ＭＳ Ｐゴシック" charset="-128"/>
+              </a:rPr>
+              <a:t>Typical React app pattern: </a:t>
+            </a:r>
+            <a:r>
               <a:rPr lang="en-US" altLang="en-US" sz="2000" b="1" dirty="0">
                 <a:latin typeface="Arial" charset="0"/>
                 <a:ea typeface="ＭＳ Ｐゴシック" charset="-128"/>
               </a:rPr>
-              <a:t>Typical React app pattern: A </a:t>
+              <a:t>A small subset of the components are stateful</a:t>
             </a:r>
             <a:r>
               <a:rPr lang="en-US" altLang="en-US" sz="2000" dirty="0">
                 <a:latin typeface="Arial" charset="0"/>
                 <a:ea typeface="ＭＳ Ｐゴシック" charset="-128"/>
               </a:rPr>
-              <a:t>small subset </a:t>
-            </a:r>
-            <a:r>
-              <a:rPr lang="en-US" altLang="en-US" sz="2000" b="1" dirty="0">
-                <a:latin typeface="Arial" charset="0"/>
-                <a:ea typeface="ＭＳ Ｐゴシック" charset="-128"/>
-              </a:rPr>
-              <a:t>of the components are </a:t>
-            </a:r>
-            <a:r>
-              <a:rPr lang="en-US" altLang="en-US" sz="2000" dirty="0">
-                <a:latin typeface="Arial" charset="0"/>
-                <a:ea typeface="ＭＳ Ｐゴシック" charset="-128"/>
-              </a:rPr>
-              <a:t>stateful</a:t>
-            </a:r>
-            <a:r>
-              <a:rPr lang="en-US" altLang="en-US" sz="2000" b="1" dirty="0">
-                <a:latin typeface="Arial" charset="0"/>
-                <a:ea typeface="ＭＳ Ｐゴシック" charset="-128"/>
-              </a:rPr>
-              <a:t>; the majority are </a:t>
-            </a:r>
-            <a:r>
-              <a:rPr lang="en-US" altLang="en-US" sz="2000" dirty="0">
-                <a:latin typeface="Arial" charset="0"/>
-                <a:ea typeface="ＭＳ Ｐゴシック" charset="-128"/>
-              </a:rPr>
-              <a:t>stateless</a:t>
-            </a:r>
-            <a:r>
-              <a:rPr lang="en-US" altLang="en-US" sz="2000" b="1" dirty="0">
-                <a:latin typeface="Arial" charset="0"/>
-                <a:ea typeface="ＭＳ Ｐゴシック" charset="-128"/>
-              </a:rPr>
-              <a:t>.</a:t>
+              <a:t>; the majority are stateless.</a:t>
             </a:r>
           </a:p>
           <a:p>
@@ -20647,7 +20566,7 @@
               <a:defRPr/>
             </a:pPr>
             <a:r>
-              <a:rPr lang="en-US" altLang="en-US" sz="2000" b="1" dirty="0">
+              <a:rPr lang="en-US" altLang="en-US" sz="2000" dirty="0">
                 <a:latin typeface="Arial" charset="0"/>
                 <a:ea typeface="ＭＳ Ｐゴシック" charset="-128"/>
               </a:rPr>
@@ -20664,7 +20583,7 @@
               <a:defRPr/>
             </a:pPr>
             <a:r>
-              <a:rPr lang="en-US" altLang="en-US" sz="2000" b="1" dirty="0">
+              <a:rPr lang="en-US" altLang="en-US" sz="2000" dirty="0">
                 <a:latin typeface="Arial" charset="0"/>
                 <a:ea typeface="ＭＳ Ｐゴシック" charset="-128"/>
               </a:rPr>
@@ -20681,7 +20600,7 @@
               <a:defRPr/>
             </a:pPr>
             <a:r>
-              <a:rPr lang="en-US" altLang="en-US" sz="2000" b="1" dirty="0">
+              <a:rPr lang="en-US" altLang="en-US" sz="2000" dirty="0">
                 <a:latin typeface="Arial" charset="0"/>
                 <a:ea typeface="ＭＳ Ｐゴシック" charset="-128"/>
               </a:rPr>
@@ -20698,7 +20617,7 @@
               <a:defRPr/>
             </a:pPr>
             <a:r>
-              <a:rPr lang="en-US" altLang="en-US" sz="2000" b="1" dirty="0">
+              <a:rPr lang="en-US" altLang="en-US" sz="2000" dirty="0">
                 <a:latin typeface="Arial" charset="0"/>
                 <a:ea typeface="ＭＳ Ｐゴシック" charset="-128"/>
               </a:rPr>
@@ -20715,7 +20634,7 @@
               <a:defRPr/>
             </a:pPr>
             <a:r>
-              <a:rPr lang="en-US" altLang="en-US" sz="2000" b="1" dirty="0">
+              <a:rPr lang="en-US" altLang="en-US" sz="2000" dirty="0">
                 <a:latin typeface="Arial" charset="0"/>
                 <a:ea typeface="ＭＳ Ｐゴシック" charset="-128"/>
               </a:rPr>
@@ -20732,7 +20651,7 @@
               <a:defRPr/>
             </a:pPr>
             <a:r>
-              <a:rPr lang="en-US" altLang="en-US" sz="2000" b="1" dirty="0">
+              <a:rPr lang="en-US" altLang="en-US" sz="2000" dirty="0">
                 <a:latin typeface="Arial" charset="0"/>
                 <a:ea typeface="ＭＳ Ｐゴシック" charset="-128"/>
               </a:rPr>
